--- a/smoke_samples/14_transitions.pptx
+++ b/smoke_samples/14_transitions.pptx
@@ -8,6 +8,8 @@
     <p:sldId id="257" r:id="rId3"/>
     <p:sldId id="258" r:id="rId4"/>
     <p:sldId id="259" r:id="rId5"/>
+    <p:sldId id="260" r:id="rId6"/>
+    <p:sldId id="261" r:id="rId7"/>
   </p:sldIdLst>
   <p:sldSz cx="9144000" cy="6858000" type="screen4x3"/>
   <p:notesSz cx="6858000" cy="9144000"/>
@@ -231,7 +233,7 @@
         <p:spPr>
           <a:xfrm>
             <a:off x="457200" y="274638"/>
-            <a:ext cx="8230200" cy="1143000"/>
+            <a:ext cx="8229600" cy="1143000"/>
           </a:xfrm>
           <a:prstGeom prst="rect">
             <a:avLst/>
@@ -244,7 +246,7 @@
           <a:p>
             <a:pPr algn="l"/>
             <a:r>
-              <a:rPr lang="en-US" sz="4400" b="1" i="0" dirty="0"/>
+              <a:rPr lang="en-US" sz="4400" b="0" i="0" u="none" dirty="0"/>
               <a:t>Fade Transition</a:t>
             </a:r>
           </a:p>
@@ -259,7 +261,7 @@
         <p:spPr>
           <a:xfrm>
             <a:off x="457200" y="1600200"/>
-            <a:ext cx="8230200" cy="4572000"/>
+            <a:ext cx="8229600" cy="4572000"/>
           </a:xfrm>
           <a:prstGeom prst="rect">
             <a:avLst/>
@@ -274,7 +276,7 @@
               <a:buChar char="•"/>
             </a:pPr>
             <a:r>
-              <a:rPr lang="en-US" sz="2800" b="0" i="0" dirty="0"/>
+              <a:rPr lang="en-US" sz="2800" b="0" i="0" u="none" dirty="0"/>
               <a:t>This slide fades in</a:t>
             </a:r>
           </a:p>
@@ -322,7 +324,7 @@
         <p:spPr>
           <a:xfrm>
             <a:off x="457200" y="274638"/>
-            <a:ext cx="8230200" cy="1143000"/>
+            <a:ext cx="8229600" cy="1143000"/>
           </a:xfrm>
           <a:prstGeom prst="rect">
             <a:avLst/>
@@ -335,8 +337,8 @@
           <a:p>
             <a:pPr algn="l"/>
             <a:r>
-              <a:rPr lang="en-US" sz="4400" b="1" i="0" dirty="0"/>
-              <a:t>Push Transition</a:t>
+              <a:rPr lang="en-US" sz="4400" b="0" i="0" u="none" dirty="0"/>
+              <a:t>Push Transition (Left)</a:t>
             </a:r>
           </a:p>
         </p:txBody>
@@ -350,7 +352,7 @@
         <p:spPr>
           <a:xfrm>
             <a:off x="457200" y="1600200"/>
-            <a:ext cx="8230200" cy="4572000"/>
+            <a:ext cx="8229600" cy="4572000"/>
           </a:xfrm>
           <a:prstGeom prst="rect">
             <a:avLst/>
@@ -365,8 +367,8 @@
               <a:buChar char="•"/>
             </a:pPr>
             <a:r>
-              <a:rPr lang="en-US" sz="2800" b="0" i="0" dirty="0"/>
-              <a:t>This slide pushes in</a:t>
+              <a:rPr lang="en-US" sz="2800" b="0" i="0" u="none" dirty="0"/>
+              <a:t>This slide pushes from the left</a:t>
             </a:r>
           </a:p>
         </p:txBody>
@@ -377,7 +379,7 @@
     <a:masterClrMapping/>
   </p:clrMapOvr>
   <p:transition>
-    <p:push dir="r"/>
+    <p:push dir="l"/>
   </p:transition>
 </p:sld>
 </file>
@@ -413,7 +415,7 @@
         <p:spPr>
           <a:xfrm>
             <a:off x="457200" y="274638"/>
-            <a:ext cx="8230200" cy="1143000"/>
+            <a:ext cx="8229600" cy="1143000"/>
           </a:xfrm>
           <a:prstGeom prst="rect">
             <a:avLst/>
@@ -426,8 +428,8 @@
           <a:p>
             <a:pPr algn="l"/>
             <a:r>
-              <a:rPr lang="en-US" sz="4400" b="1" i="0" dirty="0"/>
-              <a:t>Wipe Transition</a:t>
+              <a:rPr lang="en-US" sz="4400" b="0" i="0" u="none" dirty="0"/>
+              <a:t>Wipe Transition (Up)</a:t>
             </a:r>
           </a:p>
         </p:txBody>
@@ -441,7 +443,7 @@
         <p:spPr>
           <a:xfrm>
             <a:off x="457200" y="1600200"/>
-            <a:ext cx="8230200" cy="4572000"/>
+            <a:ext cx="8229600" cy="4572000"/>
           </a:xfrm>
           <a:prstGeom prst="rect">
             <a:avLst/>
@@ -456,8 +458,8 @@
               <a:buChar char="•"/>
             </a:pPr>
             <a:r>
-              <a:rPr lang="en-US" sz="2800" b="0" i="0" dirty="0"/>
-              <a:t>This slide wipes in</a:t>
+              <a:rPr lang="en-US" sz="2800" b="0" i="0" u="none" dirty="0"/>
+              <a:t>This slide wipes from the bottom up</a:t>
             </a:r>
           </a:p>
         </p:txBody>
@@ -468,7 +470,189 @@
     <a:masterClrMapping/>
   </p:clrMapOvr>
   <p:transition>
-    <p:wipe dir="r"/>
+    <p:wipe dir="u"/>
+  </p:transition>
+</p:sld>
+</file>
+
+<file path=ppt/slides/slide4.xml><?xml version="1.0" encoding="utf-8"?>
+<p:sld xmlns:a="http://schemas.openxmlformats.org/drawingml/2006/main" xmlns:c="http://schemas.openxmlformats.org/drawingml/2006/chart" xmlns:r="http://schemas.openxmlformats.org/officeDocument/2006/relationships" xmlns:p="http://schemas.openxmlformats.org/presentationml/2006/main">
+  <p:cSld>
+    <p:bg>
+      <p:bgRef idx="1001">
+        <a:schemeClr val="bg1"/>
+      </p:bgRef>
+    </p:bg>
+    <p:spTree>
+      <p:nvGrpSpPr>
+        <p:cNvPr id="1" name=""/>
+        <p:cNvGrpSpPr/>
+        <p:nvPr/>
+      </p:nvGrpSpPr>
+      <p:grpSpPr>
+        <a:xfrm>
+          <a:off x="0" y="0"/>
+          <a:ext cx="9144000" cy="6858000"/>
+          <a:chOff x="0" y="0"/>
+          <a:chExt cx="9144000" cy="6858000"/>
+        </a:xfrm>
+      </p:grpSpPr>
+      <p:sp>
+        <p:nvSpPr>
+          <p:cNvPr id="2" name="Title"/>
+          <p:cNvSpPr txBox="1"/>
+          <p:nvPr/>
+        </p:nvSpPr>
+        <p:spPr>
+          <a:xfrm>
+            <a:off x="457200" y="274638"/>
+            <a:ext cx="8229600" cy="1143000"/>
+          </a:xfrm>
+          <a:prstGeom prst="rect">
+            <a:avLst/>
+          </a:prstGeom>
+          <a:noFill/>
+        </p:spPr>
+        <p:txBody>
+          <a:bodyPr wrap="square" rtlCol="0" anchor="ctr"/>
+          <a:lstStyle/>
+          <a:p>
+            <a:pPr algn="l"/>
+            <a:r>
+              <a:rPr lang="en-US" sz="4400" b="0" i="0" u="none" dirty="0"/>
+              <a:t>Strips Transition (Right-Down)</a:t>
+            </a:r>
+          </a:p>
+        </p:txBody>
+      </p:sp>
+      <p:sp>
+        <p:nvSpPr>
+          <p:cNvPr id="3" name="Content"/>
+          <p:cNvSpPr txBox="1"/>
+          <p:nvPr/>
+        </p:nvSpPr>
+        <p:spPr>
+          <a:xfrm>
+            <a:off x="457200" y="1600200"/>
+            <a:ext cx="8229600" cy="4572000"/>
+          </a:xfrm>
+          <a:prstGeom prst="rect">
+            <a:avLst/>
+          </a:prstGeom>
+          <a:noFill/>
+        </p:spPr>
+        <p:txBody>
+          <a:bodyPr wrap="square" rtlCol="0"/>
+          <a:lstStyle/>
+          <a:p>
+            <a:pPr lvl="0" marL="457200" indent="-457200">
+              <a:buChar char="•"/>
+            </a:pPr>
+            <a:r>
+              <a:rPr lang="en-US" sz="2800" b="0" i="0" u="none" dirty="0"/>
+              <a:t>This slide uses strips from top-left to bottom-right</a:t>
+            </a:r>
+          </a:p>
+        </p:txBody>
+      </p:sp>
+    </p:spTree>
+  </p:cSld>
+  <p:clrMapOvr>
+    <a:masterClrMapping/>
+  </p:clrMapOvr>
+  <p:transition>
+    <p:strips dir="rd"/>
+  </p:transition>
+</p:sld>
+</file>
+
+<file path=ppt/slides/slide5.xml><?xml version="1.0" encoding="utf-8"?>
+<p:sld xmlns:a="http://schemas.openxmlformats.org/drawingml/2006/main" xmlns:c="http://schemas.openxmlformats.org/drawingml/2006/chart" xmlns:r="http://schemas.openxmlformats.org/officeDocument/2006/relationships" xmlns:p="http://schemas.openxmlformats.org/presentationml/2006/main">
+  <p:cSld>
+    <p:bg>
+      <p:bgRef idx="1001">
+        <a:schemeClr val="bg1"/>
+      </p:bgRef>
+    </p:bg>
+    <p:spTree>
+      <p:nvGrpSpPr>
+        <p:cNvPr id="1" name=""/>
+        <p:cNvGrpSpPr/>
+        <p:nvPr/>
+      </p:nvGrpSpPr>
+      <p:grpSpPr>
+        <a:xfrm>
+          <a:off x="0" y="0"/>
+          <a:ext cx="9144000" cy="6858000"/>
+          <a:chOff x="0" y="0"/>
+          <a:chExt cx="9144000" cy="6858000"/>
+        </a:xfrm>
+      </p:grpSpPr>
+      <p:sp>
+        <p:nvSpPr>
+          <p:cNvPr id="2" name="Title"/>
+          <p:cNvSpPr txBox="1"/>
+          <p:nvPr/>
+        </p:nvSpPr>
+        <p:spPr>
+          <a:xfrm>
+            <a:off x="457200" y="274638"/>
+            <a:ext cx="8229600" cy="1143000"/>
+          </a:xfrm>
+          <a:prstGeom prst="rect">
+            <a:avLst/>
+          </a:prstGeom>
+          <a:noFill/>
+        </p:spPr>
+        <p:txBody>
+          <a:bodyPr wrap="square" rtlCol="0" anchor="ctr"/>
+          <a:lstStyle/>
+          <a:p>
+            <a:pPr algn="l"/>
+            <a:r>
+              <a:rPr lang="en-US" sz="4400" b="0" i="0" u="none" dirty="0"/>
+              <a:t>Clock Transition (3 spokes)</a:t>
+            </a:r>
+          </a:p>
+        </p:txBody>
+      </p:sp>
+      <p:sp>
+        <p:nvSpPr>
+          <p:cNvPr id="3" name="Content"/>
+          <p:cNvSpPr txBox="1"/>
+          <p:nvPr/>
+        </p:nvSpPr>
+        <p:spPr>
+          <a:xfrm>
+            <a:off x="457200" y="1600200"/>
+            <a:ext cx="8229600" cy="4572000"/>
+          </a:xfrm>
+          <a:prstGeom prst="rect">
+            <a:avLst/>
+          </a:prstGeom>
+          <a:noFill/>
+        </p:spPr>
+        <p:txBody>
+          <a:bodyPr wrap="square" rtlCol="0"/>
+          <a:lstStyle/>
+          <a:p>
+            <a:pPr lvl="0" marL="457200" indent="-457200">
+              <a:buChar char="•"/>
+            </a:pPr>
+            <a:r>
+              <a:rPr lang="en-US" sz="2800" b="0" i="0" u="none" dirty="0"/>
+              <a:t>This slide uses a wheel/clock transition with 3 spokes</a:t>
+            </a:r>
+          </a:p>
+        </p:txBody>
+      </p:sp>
+    </p:spTree>
+  </p:cSld>
+  <p:clrMapOvr>
+    <a:masterClrMapping/>
+  </p:clrMapOvr>
+  <p:transition>
+    <p:wheel spokes="3"/>
   </p:transition>
 </p:sld>
 </file>

--- a/smoke_samples/14_transitions.pptx
+++ b/smoke_samples/14_transitions.pptx
@@ -269,14 +269,14 @@
           <a:noFill/>
         </p:spPr>
         <p:txBody>
-          <a:bodyPr wrap="square" rtlCol="0"/>
+          <a:bodyPr wrap="square" rtlCol="0" anchor="t"/>
           <a:lstStyle/>
           <a:p>
             <a:pPr lvl="0" marL="457200" indent="-457200">
               <a:buChar char="•"/>
             </a:pPr>
             <a:r>
-              <a:rPr lang="en-US" sz="2800" b="0" i="0" u="none" dirty="0"/>
+              <a:rPr lang="en-US" sz="1800" b="0" i="0" u="none" dirty="0"/>
               <a:t>This slide fades in</a:t>
             </a:r>
           </a:p>
@@ -360,14 +360,14 @@
           <a:noFill/>
         </p:spPr>
         <p:txBody>
-          <a:bodyPr wrap="square" rtlCol="0"/>
+          <a:bodyPr wrap="square" rtlCol="0" anchor="t"/>
           <a:lstStyle/>
           <a:p>
             <a:pPr lvl="0" marL="457200" indent="-457200">
               <a:buChar char="•"/>
             </a:pPr>
             <a:r>
-              <a:rPr lang="en-US" sz="2800" b="0" i="0" u="none" dirty="0"/>
+              <a:rPr lang="en-US" sz="1800" b="0" i="0" u="none" dirty="0"/>
               <a:t>This slide pushes from the left</a:t>
             </a:r>
           </a:p>
@@ -451,14 +451,14 @@
           <a:noFill/>
         </p:spPr>
         <p:txBody>
-          <a:bodyPr wrap="square" rtlCol="0"/>
+          <a:bodyPr wrap="square" rtlCol="0" anchor="t"/>
           <a:lstStyle/>
           <a:p>
             <a:pPr lvl="0" marL="457200" indent="-457200">
               <a:buChar char="•"/>
             </a:pPr>
             <a:r>
-              <a:rPr lang="en-US" sz="2800" b="0" i="0" u="none" dirty="0"/>
+              <a:rPr lang="en-US" sz="1800" b="0" i="0" u="none" dirty="0"/>
               <a:t>This slide wipes from the bottom up</a:t>
             </a:r>
           </a:p>
@@ -542,14 +542,14 @@
           <a:noFill/>
         </p:spPr>
         <p:txBody>
-          <a:bodyPr wrap="square" rtlCol="0"/>
+          <a:bodyPr wrap="square" rtlCol="0" anchor="t"/>
           <a:lstStyle/>
           <a:p>
             <a:pPr lvl="0" marL="457200" indent="-457200">
               <a:buChar char="•"/>
             </a:pPr>
             <a:r>
-              <a:rPr lang="en-US" sz="2800" b="0" i="0" u="none" dirty="0"/>
+              <a:rPr lang="en-US" sz="1800" b="0" i="0" u="none" dirty="0"/>
               <a:t>This slide uses strips from top-left to bottom-right</a:t>
             </a:r>
           </a:p>
@@ -633,14 +633,14 @@
           <a:noFill/>
         </p:spPr>
         <p:txBody>
-          <a:bodyPr wrap="square" rtlCol="0"/>
+          <a:bodyPr wrap="square" rtlCol="0" anchor="t"/>
           <a:lstStyle/>
           <a:p>
             <a:pPr lvl="0" marL="457200" indent="-457200">
               <a:buChar char="•"/>
             </a:pPr>
             <a:r>
-              <a:rPr lang="en-US" sz="2800" b="0" i="0" u="none" dirty="0"/>
+              <a:rPr lang="en-US" sz="1800" b="0" i="0" u="none" dirty="0"/>
               <a:t>This slide uses a wheel/clock transition with 3 spokes</a:t>
             </a:r>
           </a:p>

--- a/smoke_samples/14_transitions.pptx
+++ b/smoke_samples/14_transitions.pptx
@@ -205,11 +205,6 @@
 <file path=ppt/slides/slide1.xml><?xml version="1.0" encoding="utf-8"?>
 <p:sld xmlns:a="http://schemas.openxmlformats.org/drawingml/2006/main" xmlns:c="http://schemas.openxmlformats.org/drawingml/2006/chart" xmlns:r="http://schemas.openxmlformats.org/officeDocument/2006/relationships" xmlns:p="http://schemas.openxmlformats.org/presentationml/2006/main">
   <p:cSld>
-    <p:bg>
-      <p:bgRef idx="1001">
-        <a:schemeClr val="bg1"/>
-      </p:bgRef>
-    </p:bg>
     <p:spTree>
       <p:nvGrpSpPr>
         <p:cNvPr id="1" name=""/>
@@ -296,11 +291,6 @@
 <file path=ppt/slides/slide2.xml><?xml version="1.0" encoding="utf-8"?>
 <p:sld xmlns:a="http://schemas.openxmlformats.org/drawingml/2006/main" xmlns:c="http://schemas.openxmlformats.org/drawingml/2006/chart" xmlns:r="http://schemas.openxmlformats.org/officeDocument/2006/relationships" xmlns:p="http://schemas.openxmlformats.org/presentationml/2006/main">
   <p:cSld>
-    <p:bg>
-      <p:bgRef idx="1001">
-        <a:schemeClr val="bg1"/>
-      </p:bgRef>
-    </p:bg>
     <p:spTree>
       <p:nvGrpSpPr>
         <p:cNvPr id="1" name=""/>
@@ -387,11 +377,6 @@
 <file path=ppt/slides/slide3.xml><?xml version="1.0" encoding="utf-8"?>
 <p:sld xmlns:a="http://schemas.openxmlformats.org/drawingml/2006/main" xmlns:c="http://schemas.openxmlformats.org/drawingml/2006/chart" xmlns:r="http://schemas.openxmlformats.org/officeDocument/2006/relationships" xmlns:p="http://schemas.openxmlformats.org/presentationml/2006/main">
   <p:cSld>
-    <p:bg>
-      <p:bgRef idx="1001">
-        <a:schemeClr val="bg1"/>
-      </p:bgRef>
-    </p:bg>
     <p:spTree>
       <p:nvGrpSpPr>
         <p:cNvPr id="1" name=""/>
@@ -478,11 +463,6 @@
 <file path=ppt/slides/slide4.xml><?xml version="1.0" encoding="utf-8"?>
 <p:sld xmlns:a="http://schemas.openxmlformats.org/drawingml/2006/main" xmlns:c="http://schemas.openxmlformats.org/drawingml/2006/chart" xmlns:r="http://schemas.openxmlformats.org/officeDocument/2006/relationships" xmlns:p="http://schemas.openxmlformats.org/presentationml/2006/main">
   <p:cSld>
-    <p:bg>
-      <p:bgRef idx="1001">
-        <a:schemeClr val="bg1"/>
-      </p:bgRef>
-    </p:bg>
     <p:spTree>
       <p:nvGrpSpPr>
         <p:cNvPr id="1" name=""/>
@@ -569,11 +549,6 @@
 <file path=ppt/slides/slide5.xml><?xml version="1.0" encoding="utf-8"?>
 <p:sld xmlns:a="http://schemas.openxmlformats.org/drawingml/2006/main" xmlns:c="http://schemas.openxmlformats.org/drawingml/2006/chart" xmlns:r="http://schemas.openxmlformats.org/officeDocument/2006/relationships" xmlns:p="http://schemas.openxmlformats.org/presentationml/2006/main">
   <p:cSld>
-    <p:bg>
-      <p:bgRef idx="1001">
-        <a:schemeClr val="bg1"/>
-      </p:bgRef>
-    </p:bg>
     <p:spTree>
       <p:nvGrpSpPr>
         <p:cNvPr id="1" name=""/>
@@ -658,9 +633,9 @@
 </file>
 
 <file path=ppt/theme/theme1.xml><?xml version="1.0" encoding="utf-8"?>
-<a:theme xmlns:a="http://schemas.openxmlformats.org/drawingml/2006/main" name="Office Theme">
+<a:theme xmlns:a="http://schemas.openxmlformats.org/drawingml/2006/main" name="Office Theme marketing">
   <a:themeElements>
-    <a:clrScheme name="Office">
+    <a:clrScheme name="Office colors">
       <a:dk1>
         <a:sysClr val="windowText" lastClr="000000"/>
       </a:dk1>
@@ -698,7 +673,7 @@
         <a:srgbClr val="800080"/>
       </a:folHlink>
     </a:clrScheme>
-    <a:fontScheme name="Office">
+    <a:fontScheme name="Office fonts">
       <a:majorFont>
         <a:latin typeface="Calibri"/>
         <a:ea typeface=""/>

--- a/smoke_samples/14_transitions.pptx
+++ b/smoke_samples/14_transitions.pptx
@@ -10,6 +10,7 @@
     <p:sldId id="259" r:id="rId5"/>
     <p:sldId id="260" r:id="rId6"/>
     <p:sldId id="261" r:id="rId7"/>
+    <p:sldId id="262" r:id="rId8"/>
   </p:sldIdLst>
   <p:sldSz cx="9144000" cy="6858000" type="screen4x3"/>
   <p:notesSz cx="6858000" cy="9144000"/>
@@ -628,6 +629,97 @@
   </p:clrMapOvr>
   <p:transition>
     <p:wheel spokes="3"/>
+  </p:transition>
+</p:sld>
+</file>
+
+<file path=ppt/slides/slide6.xml><?xml version="1.0" encoding="utf-8"?>
+<p:sld xmlns:a="http://schemas.openxmlformats.org/drawingml/2006/main" xmlns:c="http://schemas.openxmlformats.org/drawingml/2006/chart" xmlns:r="http://schemas.openxmlformats.org/officeDocument/2006/relationships" xmlns:p="http://schemas.openxmlformats.org/presentationml/2006/main">
+  <p:cSld>
+    <p:spTree>
+      <p:nvGrpSpPr>
+        <p:cNvPr id="1" name=""/>
+        <p:cNvGrpSpPr/>
+        <p:nvPr/>
+      </p:nvGrpSpPr>
+      <p:grpSpPr>
+        <a:xfrm>
+          <a:off x="0" y="0"/>
+          <a:ext cx="9144000" cy="6858000"/>
+          <a:chOff x="0" y="0"/>
+          <a:chExt cx="9144000" cy="6858000"/>
+        </a:xfrm>
+      </p:grpSpPr>
+      <p:sp>
+        <p:nvSpPr>
+          <p:cNvPr id="2" name="Title"/>
+          <p:cNvSpPr txBox="1"/>
+          <p:nvPr/>
+        </p:nvSpPr>
+        <p:spPr>
+          <a:xfrm>
+            <a:off x="457200" y="274638"/>
+            <a:ext cx="8229600" cy="1143000"/>
+          </a:xfrm>
+          <a:prstGeom prst="rect">
+            <a:avLst/>
+          </a:prstGeom>
+          <a:noFill/>
+        </p:spPr>
+        <p:txBody>
+          <a:bodyPr wrap="square" rtlCol="0" anchor="ctr"/>
+          <a:lstStyle/>
+          <a:p>
+            <a:pPr algn="l"/>
+            <a:r>
+              <a:rPr lang="en-US" sz="4400" b="0" i="0" u="none" dirty="0"/>
+              <a:t>Transition with Sound</a:t>
+            </a:r>
+          </a:p>
+        </p:txBody>
+      </p:sp>
+      <p:sp>
+        <p:nvSpPr>
+          <p:cNvPr id="3" name="Content"/>
+          <p:cNvSpPr txBox="1"/>
+          <p:nvPr/>
+        </p:nvSpPr>
+        <p:spPr>
+          <a:xfrm>
+            <a:off x="457200" y="1600200"/>
+            <a:ext cx="8229600" cy="4572000"/>
+          </a:xfrm>
+          <a:prstGeom prst="rect">
+            <a:avLst/>
+          </a:prstGeom>
+          <a:noFill/>
+        </p:spPr>
+        <p:txBody>
+          <a:bodyPr wrap="square" rtlCol="0" anchor="t"/>
+          <a:lstStyle/>
+          <a:p>
+            <a:pPr lvl="0" marL="457200" indent="-457200">
+              <a:buChar char="•"/>
+            </a:pPr>
+            <a:r>
+              <a:rPr lang="en-US" sz="1800" b="0" i="0" u="none" dirty="0"/>
+              <a:t>This slide has a circle transition with sound</a:t>
+            </a:r>
+          </a:p>
+        </p:txBody>
+      </p:sp>
+    </p:spTree>
+  </p:cSld>
+  <p:clrMapOvr>
+    <a:masterClrMapping/>
+  </p:clrMapOvr>
+  <p:transition>
+    <p:sndAc>
+      <p:stSnd>
+        <p:snd r:embed="rId2" name="transition_sound.wav"/>
+      </p:stSnd>
+    </p:sndAc>
+    <p:circle/>
   </p:transition>
 </p:sld>
 </file>
